--- a/dapr3_lectures/block2_fa/img_sandbox/lsat.pptx
+++ b/dapr3_lectures/block2_fa/img_sandbox/lsat.pptx
@@ -6,6 +6,7 @@
   </p:sldMasterIdLst>
   <p:sldIdLst>
     <p:sldId id="256" r:id="rId2"/>
+    <p:sldId id="257" r:id="rId3"/>
   </p:sldIdLst>
   <p:sldSz cx="12192000" cy="6858000"/>
   <p:notesSz cx="6858000" cy="9144000"/>
@@ -104,6 +105,11 @@
       </a:defRPr>
     </a:lvl9pPr>
   </p:defaultTextStyle>
+  <p:extLst>
+    <p:ext uri="{EFAFB233-063F-42B5-8137-9DF3F51BA10A}">
+      <p15:sldGuideLst xmlns:p15="http://schemas.microsoft.com/office/powerpoint/2012/main"/>
+    </p:ext>
+  </p:extLst>
 </p:presentation>
 </file>
 
@@ -256,7 +262,7 @@
           <a:p>
             <a:fld id="{4CEA483D-9848-45F0-A78D-25DDD2F5981D}" type="datetimeFigureOut">
               <a:rPr lang="en-GB" smtClean="0"/>
-              <a:t>13/04/2026</a:t>
+              <a:t>25/08/2026</a:t>
             </a:fld>
             <a:endParaRPr lang="en-GB"/>
           </a:p>
@@ -456,7 +462,7 @@
           <a:p>
             <a:fld id="{4CEA483D-9848-45F0-A78D-25DDD2F5981D}" type="datetimeFigureOut">
               <a:rPr lang="en-GB" smtClean="0"/>
-              <a:t>13/04/2026</a:t>
+              <a:t>25/08/2026</a:t>
             </a:fld>
             <a:endParaRPr lang="en-GB"/>
           </a:p>
@@ -666,7 +672,7 @@
           <a:p>
             <a:fld id="{4CEA483D-9848-45F0-A78D-25DDD2F5981D}" type="datetimeFigureOut">
               <a:rPr lang="en-GB" smtClean="0"/>
-              <a:t>13/04/2026</a:t>
+              <a:t>25/08/2026</a:t>
             </a:fld>
             <a:endParaRPr lang="en-GB"/>
           </a:p>
@@ -866,7 +872,7 @@
           <a:p>
             <a:fld id="{4CEA483D-9848-45F0-A78D-25DDD2F5981D}" type="datetimeFigureOut">
               <a:rPr lang="en-GB" smtClean="0"/>
-              <a:t>13/04/2026</a:t>
+              <a:t>25/08/2026</a:t>
             </a:fld>
             <a:endParaRPr lang="en-GB"/>
           </a:p>
@@ -1142,7 +1148,7 @@
           <a:p>
             <a:fld id="{4CEA483D-9848-45F0-A78D-25DDD2F5981D}" type="datetimeFigureOut">
               <a:rPr lang="en-GB" smtClean="0"/>
-              <a:t>13/04/2026</a:t>
+              <a:t>25/08/2026</a:t>
             </a:fld>
             <a:endParaRPr lang="en-GB"/>
           </a:p>
@@ -1410,7 +1416,7 @@
           <a:p>
             <a:fld id="{4CEA483D-9848-45F0-A78D-25DDD2F5981D}" type="datetimeFigureOut">
               <a:rPr lang="en-GB" smtClean="0"/>
-              <a:t>13/04/2026</a:t>
+              <a:t>25/08/2026</a:t>
             </a:fld>
             <a:endParaRPr lang="en-GB"/>
           </a:p>
@@ -1825,7 +1831,7 @@
           <a:p>
             <a:fld id="{4CEA483D-9848-45F0-A78D-25DDD2F5981D}" type="datetimeFigureOut">
               <a:rPr lang="en-GB" smtClean="0"/>
-              <a:t>13/04/2026</a:t>
+              <a:t>25/08/2026</a:t>
             </a:fld>
             <a:endParaRPr lang="en-GB"/>
           </a:p>
@@ -1967,7 +1973,7 @@
           <a:p>
             <a:fld id="{4CEA483D-9848-45F0-A78D-25DDD2F5981D}" type="datetimeFigureOut">
               <a:rPr lang="en-GB" smtClean="0"/>
-              <a:t>13/04/2026</a:t>
+              <a:t>25/08/2026</a:t>
             </a:fld>
             <a:endParaRPr lang="en-GB"/>
           </a:p>
@@ -2080,7 +2086,7 @@
           <a:p>
             <a:fld id="{4CEA483D-9848-45F0-A78D-25DDD2F5981D}" type="datetimeFigureOut">
               <a:rPr lang="en-GB" smtClean="0"/>
-              <a:t>13/04/2026</a:t>
+              <a:t>25/08/2026</a:t>
             </a:fld>
             <a:endParaRPr lang="en-GB"/>
           </a:p>
@@ -2393,7 +2399,7 @@
           <a:p>
             <a:fld id="{4CEA483D-9848-45F0-A78D-25DDD2F5981D}" type="datetimeFigureOut">
               <a:rPr lang="en-GB" smtClean="0"/>
-              <a:t>13/04/2026</a:t>
+              <a:t>25/08/2026</a:t>
             </a:fld>
             <a:endParaRPr lang="en-GB"/>
           </a:p>
@@ -2682,7 +2688,7 @@
           <a:p>
             <a:fld id="{4CEA483D-9848-45F0-A78D-25DDD2F5981D}" type="datetimeFigureOut">
               <a:rPr lang="en-GB" smtClean="0"/>
-              <a:t>13/04/2026</a:t>
+              <a:t>25/08/2026</a:t>
             </a:fld>
             <a:endParaRPr lang="en-GB"/>
           </a:p>
@@ -2925,7 +2931,7 @@
           <a:p>
             <a:fld id="{4CEA483D-9848-45F0-A78D-25DDD2F5981D}" type="datetimeFigureOut">
               <a:rPr lang="en-GB" smtClean="0"/>
-              <a:t>13/04/2026</a:t>
+              <a:t>25/08/2026</a:t>
             </a:fld>
             <a:endParaRPr lang="en-GB"/>
           </a:p>
@@ -3344,6 +3350,969 @@
       </p:grpSpPr>
       <p:sp>
         <p:nvSpPr>
+          <p:cNvPr id="5" name="TextBox 4">
+            <a:extLst>
+              <a:ext uri="{FF2B5EF4-FFF2-40B4-BE49-F238E27FC236}">
+                <a16:creationId xmlns:a16="http://schemas.microsoft.com/office/drawing/2014/main" id="{6C6BCCDB-3D7C-4D1B-9ED1-D909F6F66B7B}"/>
+              </a:ext>
+            </a:extLst>
+          </p:cNvPr>
+          <p:cNvSpPr txBox="1"/>
+          <p:nvPr/>
+        </p:nvSpPr>
+        <p:spPr>
+          <a:xfrm>
+            <a:off x="3615268" y="2357735"/>
+            <a:ext cx="6096000" cy="1477328"/>
+          </a:xfrm>
+          <a:prstGeom prst="rect">
+            <a:avLst/>
+          </a:prstGeom>
+          <a:noFill/>
+        </p:spPr>
+        <p:txBody>
+          <a:bodyPr wrap="square">
+            <a:spAutoFit/>
+          </a:bodyPr>
+          <a:lstStyle/>
+          <a:p>
+            <a:r>
+              <a:rPr lang="en-GB" dirty="0"/>
+              <a:t>"I am satisfied with my life as a whole“</a:t>
+            </a:r>
+          </a:p>
+          <a:p>
+            <a:endParaRPr lang="en-GB" dirty="0"/>
+          </a:p>
+          <a:p>
+            <a:r>
+              <a:rPr lang="en-GB" dirty="0"/>
+              <a:t>"The conditions of my life are excellent“</a:t>
+            </a:r>
+          </a:p>
+          <a:p>
+            <a:r>
+              <a:rPr lang="en-GB" dirty="0"/>
+              <a:t>  </a:t>
+            </a:r>
+          </a:p>
+          <a:p>
+            <a:r>
+              <a:rPr lang="en-GB" dirty="0"/>
+              <a:t>"I feel content with how things have gone today" </a:t>
+            </a:r>
+          </a:p>
+        </p:txBody>
+      </p:sp>
+      <p:sp>
+        <p:nvSpPr>
+          <p:cNvPr id="12" name="TextBox 11">
+            <a:extLst>
+              <a:ext uri="{FF2B5EF4-FFF2-40B4-BE49-F238E27FC236}">
+                <a16:creationId xmlns:a16="http://schemas.microsoft.com/office/drawing/2014/main" id="{BA65B1E8-8EDF-4C1A-9EC6-3BE9C9D9E105}"/>
+              </a:ext>
+            </a:extLst>
+          </p:cNvPr>
+          <p:cNvSpPr txBox="1"/>
+          <p:nvPr/>
+        </p:nvSpPr>
+        <p:spPr>
+          <a:xfrm>
+            <a:off x="7683512" y="4969418"/>
+            <a:ext cx="1385957" cy="369332"/>
+          </a:xfrm>
+          <a:prstGeom prst="rect">
+            <a:avLst/>
+          </a:prstGeom>
+          <a:noFill/>
+        </p:spPr>
+        <p:txBody>
+          <a:bodyPr wrap="none" rtlCol="0">
+            <a:spAutoFit/>
+          </a:bodyPr>
+          <a:lstStyle/>
+          <a:p>
+            <a:r>
+              <a:rPr lang="en-GB" dirty="0">
+                <a:solidFill>
+                  <a:srgbClr val="FF7979"/>
+                </a:solidFill>
+              </a:rPr>
+              <a:t>the weather </a:t>
+            </a:r>
+          </a:p>
+        </p:txBody>
+      </p:sp>
+      <p:sp>
+        <p:nvSpPr>
+          <p:cNvPr id="14" name="TextBox 13">
+            <a:extLst>
+              <a:ext uri="{FF2B5EF4-FFF2-40B4-BE49-F238E27FC236}">
+                <a16:creationId xmlns:a16="http://schemas.microsoft.com/office/drawing/2014/main" id="{A3205A6C-0005-4449-AEE5-B5740D6D91F3}"/>
+              </a:ext>
+            </a:extLst>
+          </p:cNvPr>
+          <p:cNvSpPr txBox="1"/>
+          <p:nvPr/>
+        </p:nvSpPr>
+        <p:spPr>
+          <a:xfrm>
+            <a:off x="8051011" y="4577540"/>
+            <a:ext cx="1284839" cy="369332"/>
+          </a:xfrm>
+          <a:prstGeom prst="rect">
+            <a:avLst/>
+          </a:prstGeom>
+          <a:noFill/>
+        </p:spPr>
+        <p:txBody>
+          <a:bodyPr wrap="none" rtlCol="0">
+            <a:spAutoFit/>
+          </a:bodyPr>
+          <a:lstStyle/>
+          <a:p>
+            <a:r>
+              <a:rPr lang="en-GB" dirty="0">
+                <a:solidFill>
+                  <a:srgbClr val="FF7979"/>
+                </a:solidFill>
+              </a:rPr>
+              <a:t>blood sugar</a:t>
+            </a:r>
+          </a:p>
+        </p:txBody>
+      </p:sp>
+      <p:sp>
+        <p:nvSpPr>
+          <p:cNvPr id="15" name="TextBox 14">
+            <a:extLst>
+              <a:ext uri="{FF2B5EF4-FFF2-40B4-BE49-F238E27FC236}">
+                <a16:creationId xmlns:a16="http://schemas.microsoft.com/office/drawing/2014/main" id="{F1C9CEE7-7B58-4B10-937A-24677B5CD7DF}"/>
+              </a:ext>
+            </a:extLst>
+          </p:cNvPr>
+          <p:cNvSpPr txBox="1"/>
+          <p:nvPr/>
+        </p:nvSpPr>
+        <p:spPr>
+          <a:xfrm>
+            <a:off x="9343377" y="3368075"/>
+            <a:ext cx="735779" cy="369332"/>
+          </a:xfrm>
+          <a:prstGeom prst="rect">
+            <a:avLst/>
+          </a:prstGeom>
+          <a:noFill/>
+        </p:spPr>
+        <p:txBody>
+          <a:bodyPr wrap="none" rtlCol="0">
+            <a:spAutoFit/>
+          </a:bodyPr>
+          <a:lstStyle/>
+          <a:p>
+            <a:r>
+              <a:rPr lang="en-GB" dirty="0">
+                <a:solidFill>
+                  <a:srgbClr val="FF7979"/>
+                </a:solidFill>
+              </a:rPr>
+              <a:t>traffic</a:t>
+            </a:r>
+          </a:p>
+        </p:txBody>
+      </p:sp>
+      <p:sp>
+        <p:nvSpPr>
+          <p:cNvPr id="16" name="TextBox 15">
+            <a:extLst>
+              <a:ext uri="{FF2B5EF4-FFF2-40B4-BE49-F238E27FC236}">
+                <a16:creationId xmlns:a16="http://schemas.microsoft.com/office/drawing/2014/main" id="{AA9AA2C5-7829-405B-8026-C082EE8C9D28}"/>
+              </a:ext>
+            </a:extLst>
+          </p:cNvPr>
+          <p:cNvSpPr txBox="1"/>
+          <p:nvPr/>
+        </p:nvSpPr>
+        <p:spPr>
+          <a:xfrm>
+            <a:off x="9363020" y="3760232"/>
+            <a:ext cx="1374094" cy="369332"/>
+          </a:xfrm>
+          <a:prstGeom prst="rect">
+            <a:avLst/>
+          </a:prstGeom>
+          <a:noFill/>
+        </p:spPr>
+        <p:txBody>
+          <a:bodyPr wrap="none" rtlCol="0">
+            <a:spAutoFit/>
+          </a:bodyPr>
+          <a:lstStyle/>
+          <a:p>
+            <a:r>
+              <a:rPr lang="en-GB" dirty="0">
+                <a:solidFill>
+                  <a:srgbClr val="FF7979"/>
+                </a:solidFill>
+              </a:rPr>
+              <a:t>sleep quality</a:t>
+            </a:r>
+          </a:p>
+        </p:txBody>
+      </p:sp>
+      <p:sp>
+        <p:nvSpPr>
+          <p:cNvPr id="17" name="TextBox 16">
+            <a:extLst>
+              <a:ext uri="{FF2B5EF4-FFF2-40B4-BE49-F238E27FC236}">
+                <a16:creationId xmlns:a16="http://schemas.microsoft.com/office/drawing/2014/main" id="{48485719-F58D-4ADF-BD80-BBC3AB8531A8}"/>
+              </a:ext>
+            </a:extLst>
+          </p:cNvPr>
+          <p:cNvSpPr txBox="1"/>
+          <p:nvPr/>
+        </p:nvSpPr>
+        <p:spPr>
+          <a:xfrm>
+            <a:off x="9190718" y="4190643"/>
+            <a:ext cx="1673663" cy="369332"/>
+          </a:xfrm>
+          <a:prstGeom prst="rect">
+            <a:avLst/>
+          </a:prstGeom>
+          <a:noFill/>
+        </p:spPr>
+        <p:txBody>
+          <a:bodyPr wrap="none" rtlCol="0">
+            <a:spAutoFit/>
+          </a:bodyPr>
+          <a:lstStyle/>
+          <a:p>
+            <a:r>
+              <a:rPr lang="en-GB" dirty="0">
+                <a:solidFill>
+                  <a:srgbClr val="FF7979"/>
+                </a:solidFill>
+              </a:rPr>
+              <a:t>little wins today</a:t>
+            </a:r>
+          </a:p>
+        </p:txBody>
+      </p:sp>
+      <p:cxnSp>
+        <p:nvCxnSpPr>
+          <p:cNvPr id="28" name="Straight Arrow Connector 27">
+            <a:extLst>
+              <a:ext uri="{FF2B5EF4-FFF2-40B4-BE49-F238E27FC236}">
+                <a16:creationId xmlns:a16="http://schemas.microsoft.com/office/drawing/2014/main" id="{9C24361C-BE8D-4190-B7F1-3045E68B5F72}"/>
+              </a:ext>
+            </a:extLst>
+          </p:cNvPr>
+          <p:cNvCxnSpPr>
+            <a:cxnSpLocks/>
+          </p:cNvCxnSpPr>
+          <p:nvPr/>
+        </p:nvCxnSpPr>
+        <p:spPr>
+          <a:xfrm flipH="1">
+            <a:off x="8348251" y="3586699"/>
+            <a:ext cx="995127" cy="10316"/>
+          </a:xfrm>
+          <a:prstGeom prst="straightConnector1">
+            <a:avLst/>
+          </a:prstGeom>
+          <a:ln>
+            <a:solidFill>
+              <a:schemeClr val="accent6"/>
+            </a:solidFill>
+            <a:tailEnd type="triangle"/>
+          </a:ln>
+        </p:spPr>
+        <p:style>
+          <a:lnRef idx="1">
+            <a:schemeClr val="accent1"/>
+          </a:lnRef>
+          <a:fillRef idx="0">
+            <a:schemeClr val="accent1"/>
+          </a:fillRef>
+          <a:effectRef idx="0">
+            <a:schemeClr val="accent1"/>
+          </a:effectRef>
+          <a:fontRef idx="minor">
+            <a:schemeClr val="tx1"/>
+          </a:fontRef>
+        </p:style>
+      </p:cxnSp>
+      <p:cxnSp>
+        <p:nvCxnSpPr>
+          <p:cNvPr id="30" name="Straight Arrow Connector 29">
+            <a:extLst>
+              <a:ext uri="{FF2B5EF4-FFF2-40B4-BE49-F238E27FC236}">
+                <a16:creationId xmlns:a16="http://schemas.microsoft.com/office/drawing/2014/main" id="{310533EB-4087-4047-BC01-4DEC96B1AF42}"/>
+              </a:ext>
+            </a:extLst>
+          </p:cNvPr>
+          <p:cNvCxnSpPr>
+            <a:cxnSpLocks/>
+            <a:stCxn id="16" idx="1"/>
+          </p:cNvCxnSpPr>
+          <p:nvPr/>
+        </p:nvCxnSpPr>
+        <p:spPr>
+          <a:xfrm flipH="1" flipV="1">
+            <a:off x="8352944" y="3635518"/>
+            <a:ext cx="1010076" cy="309380"/>
+          </a:xfrm>
+          <a:prstGeom prst="straightConnector1">
+            <a:avLst/>
+          </a:prstGeom>
+          <a:ln>
+            <a:solidFill>
+              <a:schemeClr val="accent6"/>
+            </a:solidFill>
+            <a:tailEnd type="triangle"/>
+          </a:ln>
+        </p:spPr>
+        <p:style>
+          <a:lnRef idx="1">
+            <a:schemeClr val="accent1"/>
+          </a:lnRef>
+          <a:fillRef idx="0">
+            <a:schemeClr val="accent1"/>
+          </a:fillRef>
+          <a:effectRef idx="0">
+            <a:schemeClr val="accent1"/>
+          </a:effectRef>
+          <a:fontRef idx="minor">
+            <a:schemeClr val="tx1"/>
+          </a:fontRef>
+        </p:style>
+      </p:cxnSp>
+      <p:cxnSp>
+        <p:nvCxnSpPr>
+          <p:cNvPr id="32" name="Straight Arrow Connector 31">
+            <a:extLst>
+              <a:ext uri="{FF2B5EF4-FFF2-40B4-BE49-F238E27FC236}">
+                <a16:creationId xmlns:a16="http://schemas.microsoft.com/office/drawing/2014/main" id="{EAEBDCDC-CA1E-441C-84E2-0AB8714F1FC2}"/>
+              </a:ext>
+            </a:extLst>
+          </p:cNvPr>
+          <p:cNvCxnSpPr>
+            <a:cxnSpLocks/>
+            <a:stCxn id="17" idx="1"/>
+          </p:cNvCxnSpPr>
+          <p:nvPr/>
+        </p:nvCxnSpPr>
+        <p:spPr>
+          <a:xfrm flipH="1" flipV="1">
+            <a:off x="8263468" y="3740455"/>
+            <a:ext cx="927250" cy="634854"/>
+          </a:xfrm>
+          <a:prstGeom prst="straightConnector1">
+            <a:avLst/>
+          </a:prstGeom>
+          <a:ln>
+            <a:solidFill>
+              <a:schemeClr val="accent6"/>
+            </a:solidFill>
+            <a:tailEnd type="triangle"/>
+          </a:ln>
+        </p:spPr>
+        <p:style>
+          <a:lnRef idx="1">
+            <a:schemeClr val="accent1"/>
+          </a:lnRef>
+          <a:fillRef idx="0">
+            <a:schemeClr val="accent1"/>
+          </a:fillRef>
+          <a:effectRef idx="0">
+            <a:schemeClr val="accent1"/>
+          </a:effectRef>
+          <a:fontRef idx="minor">
+            <a:schemeClr val="tx1"/>
+          </a:fontRef>
+        </p:style>
+      </p:cxnSp>
+      <p:cxnSp>
+        <p:nvCxnSpPr>
+          <p:cNvPr id="34" name="Straight Arrow Connector 33">
+            <a:extLst>
+              <a:ext uri="{FF2B5EF4-FFF2-40B4-BE49-F238E27FC236}">
+                <a16:creationId xmlns:a16="http://schemas.microsoft.com/office/drawing/2014/main" id="{E6C858B1-FCA6-4689-ABF2-05EEC0616279}"/>
+              </a:ext>
+            </a:extLst>
+          </p:cNvPr>
+          <p:cNvCxnSpPr>
+            <a:cxnSpLocks/>
+          </p:cNvCxnSpPr>
+          <p:nvPr/>
+        </p:nvCxnSpPr>
+        <p:spPr>
+          <a:xfrm flipH="1" flipV="1">
+            <a:off x="8183380" y="3854141"/>
+            <a:ext cx="374958" cy="797390"/>
+          </a:xfrm>
+          <a:prstGeom prst="straightConnector1">
+            <a:avLst/>
+          </a:prstGeom>
+          <a:ln>
+            <a:solidFill>
+              <a:schemeClr val="accent6"/>
+            </a:solidFill>
+            <a:tailEnd type="triangle"/>
+          </a:ln>
+        </p:spPr>
+        <p:style>
+          <a:lnRef idx="1">
+            <a:schemeClr val="accent1"/>
+          </a:lnRef>
+          <a:fillRef idx="0">
+            <a:schemeClr val="accent1"/>
+          </a:fillRef>
+          <a:effectRef idx="0">
+            <a:schemeClr val="accent1"/>
+          </a:effectRef>
+          <a:fontRef idx="minor">
+            <a:schemeClr val="tx1"/>
+          </a:fontRef>
+        </p:style>
+      </p:cxnSp>
+      <p:cxnSp>
+        <p:nvCxnSpPr>
+          <p:cNvPr id="37" name="Straight Arrow Connector 36">
+            <a:extLst>
+              <a:ext uri="{FF2B5EF4-FFF2-40B4-BE49-F238E27FC236}">
+                <a16:creationId xmlns:a16="http://schemas.microsoft.com/office/drawing/2014/main" id="{2F3BEC36-2CDA-4FC0-84A5-6D924152459C}"/>
+              </a:ext>
+            </a:extLst>
+          </p:cNvPr>
+          <p:cNvCxnSpPr>
+            <a:cxnSpLocks/>
+          </p:cNvCxnSpPr>
+          <p:nvPr/>
+        </p:nvCxnSpPr>
+        <p:spPr>
+          <a:xfrm flipH="1" flipV="1">
+            <a:off x="8068733" y="3855598"/>
+            <a:ext cx="73187" cy="1173602"/>
+          </a:xfrm>
+          <a:prstGeom prst="straightConnector1">
+            <a:avLst/>
+          </a:prstGeom>
+          <a:ln>
+            <a:solidFill>
+              <a:schemeClr val="accent6"/>
+            </a:solidFill>
+            <a:tailEnd type="triangle"/>
+          </a:ln>
+        </p:spPr>
+        <p:style>
+          <a:lnRef idx="1">
+            <a:schemeClr val="accent1"/>
+          </a:lnRef>
+          <a:fillRef idx="0">
+            <a:schemeClr val="accent1"/>
+          </a:fillRef>
+          <a:effectRef idx="0">
+            <a:schemeClr val="accent1"/>
+          </a:effectRef>
+          <a:fontRef idx="minor">
+            <a:schemeClr val="tx1"/>
+          </a:fontRef>
+        </p:style>
+      </p:cxnSp>
+      <p:sp>
+        <p:nvSpPr>
+          <p:cNvPr id="38" name="TextBox 37">
+            <a:extLst>
+              <a:ext uri="{FF2B5EF4-FFF2-40B4-BE49-F238E27FC236}">
+                <a16:creationId xmlns:a16="http://schemas.microsoft.com/office/drawing/2014/main" id="{2DF95A63-207D-4EE4-9BF2-93368DB30E3E}"/>
+              </a:ext>
+            </a:extLst>
+          </p:cNvPr>
+          <p:cNvSpPr txBox="1"/>
+          <p:nvPr/>
+        </p:nvSpPr>
+        <p:spPr>
+          <a:xfrm>
+            <a:off x="8131348" y="1890698"/>
+            <a:ext cx="3695435" cy="369332"/>
+          </a:xfrm>
+          <a:prstGeom prst="rect">
+            <a:avLst/>
+          </a:prstGeom>
+          <a:noFill/>
+        </p:spPr>
+        <p:txBody>
+          <a:bodyPr wrap="none" rtlCol="0">
+            <a:spAutoFit/>
+          </a:bodyPr>
+          <a:lstStyle/>
+          <a:p>
+            <a:r>
+              <a:rPr lang="en-GB" dirty="0">
+                <a:solidFill>
+                  <a:srgbClr val="FF7979"/>
+                </a:solidFill>
+              </a:rPr>
+              <a:t>social desirability to appear satisfied</a:t>
+            </a:r>
+          </a:p>
+        </p:txBody>
+      </p:sp>
+      <p:cxnSp>
+        <p:nvCxnSpPr>
+          <p:cNvPr id="40" name="Straight Arrow Connector 39">
+            <a:extLst>
+              <a:ext uri="{FF2B5EF4-FFF2-40B4-BE49-F238E27FC236}">
+                <a16:creationId xmlns:a16="http://schemas.microsoft.com/office/drawing/2014/main" id="{F4F44942-86F1-41DA-B6D1-33E2920FCBBE}"/>
+              </a:ext>
+            </a:extLst>
+          </p:cNvPr>
+          <p:cNvCxnSpPr>
+            <a:cxnSpLocks/>
+          </p:cNvCxnSpPr>
+          <p:nvPr/>
+        </p:nvCxnSpPr>
+        <p:spPr>
+          <a:xfrm flipH="1">
+            <a:off x="7391137" y="2167013"/>
+            <a:ext cx="723015" cy="320365"/>
+          </a:xfrm>
+          <a:prstGeom prst="straightConnector1">
+            <a:avLst/>
+          </a:prstGeom>
+          <a:ln>
+            <a:solidFill>
+              <a:schemeClr val="accent6"/>
+            </a:solidFill>
+            <a:tailEnd type="triangle"/>
+          </a:ln>
+        </p:spPr>
+        <p:style>
+          <a:lnRef idx="1">
+            <a:schemeClr val="accent1"/>
+          </a:lnRef>
+          <a:fillRef idx="0">
+            <a:schemeClr val="accent1"/>
+          </a:fillRef>
+          <a:effectRef idx="0">
+            <a:schemeClr val="accent1"/>
+          </a:effectRef>
+          <a:fontRef idx="minor">
+            <a:schemeClr val="tx1"/>
+          </a:fontRef>
+        </p:style>
+      </p:cxnSp>
+      <p:sp>
+        <p:nvSpPr>
+          <p:cNvPr id="49" name="TextBox 48">
+            <a:extLst>
+              <a:ext uri="{FF2B5EF4-FFF2-40B4-BE49-F238E27FC236}">
+                <a16:creationId xmlns:a16="http://schemas.microsoft.com/office/drawing/2014/main" id="{313ECCAC-DF8E-4AC3-9DCA-A681B5CB93CE}"/>
+              </a:ext>
+            </a:extLst>
+          </p:cNvPr>
+          <p:cNvSpPr txBox="1"/>
+          <p:nvPr/>
+        </p:nvSpPr>
+        <p:spPr>
+          <a:xfrm>
+            <a:off x="6645878" y="4659868"/>
+            <a:ext cx="1163652" cy="369332"/>
+          </a:xfrm>
+          <a:prstGeom prst="rect">
+            <a:avLst/>
+          </a:prstGeom>
+          <a:noFill/>
+        </p:spPr>
+        <p:txBody>
+          <a:bodyPr wrap="none" rtlCol="0">
+            <a:spAutoFit/>
+          </a:bodyPr>
+          <a:lstStyle/>
+          <a:p>
+            <a:r>
+              <a:rPr lang="en-GB" dirty="0" err="1">
+                <a:solidFill>
+                  <a:srgbClr val="FF7979"/>
+                </a:solidFill>
+              </a:rPr>
+              <a:t>i</a:t>
+            </a:r>
+            <a:r>
+              <a:rPr lang="en-GB" dirty="0">
+                <a:solidFill>
+                  <a:srgbClr val="FF7979"/>
+                </a:solidFill>
+              </a:rPr>
+              <a:t> met a cat</a:t>
+            </a:r>
+          </a:p>
+        </p:txBody>
+      </p:sp>
+      <p:cxnSp>
+        <p:nvCxnSpPr>
+          <p:cNvPr id="51" name="Straight Arrow Connector 50">
+            <a:extLst>
+              <a:ext uri="{FF2B5EF4-FFF2-40B4-BE49-F238E27FC236}">
+                <a16:creationId xmlns:a16="http://schemas.microsoft.com/office/drawing/2014/main" id="{6CC6871F-6E5F-4988-8910-416F41666C5E}"/>
+              </a:ext>
+            </a:extLst>
+          </p:cNvPr>
+          <p:cNvCxnSpPr>
+            <a:cxnSpLocks/>
+          </p:cNvCxnSpPr>
+          <p:nvPr/>
+        </p:nvCxnSpPr>
+        <p:spPr>
+          <a:xfrm flipV="1">
+            <a:off x="7391137" y="3884189"/>
+            <a:ext cx="590695" cy="800671"/>
+          </a:xfrm>
+          <a:prstGeom prst="straightConnector1">
+            <a:avLst/>
+          </a:prstGeom>
+          <a:ln>
+            <a:solidFill>
+              <a:schemeClr val="accent6"/>
+            </a:solidFill>
+            <a:tailEnd type="triangle"/>
+          </a:ln>
+        </p:spPr>
+        <p:style>
+          <a:lnRef idx="1">
+            <a:schemeClr val="accent1"/>
+          </a:lnRef>
+          <a:fillRef idx="0">
+            <a:schemeClr val="accent1"/>
+          </a:fillRef>
+          <a:effectRef idx="0">
+            <a:schemeClr val="accent1"/>
+          </a:effectRef>
+          <a:fontRef idx="minor">
+            <a:schemeClr val="tx1"/>
+          </a:fontRef>
+        </p:style>
+      </p:cxnSp>
+      <p:sp>
+        <p:nvSpPr>
+          <p:cNvPr id="55" name="TextBox 54">
+            <a:extLst>
+              <a:ext uri="{FF2B5EF4-FFF2-40B4-BE49-F238E27FC236}">
+                <a16:creationId xmlns:a16="http://schemas.microsoft.com/office/drawing/2014/main" id="{D95BBA2D-DD1E-4A7F-BDA8-43D58B7EDD4B}"/>
+              </a:ext>
+            </a:extLst>
+          </p:cNvPr>
+          <p:cNvSpPr txBox="1"/>
+          <p:nvPr/>
+        </p:nvSpPr>
+        <p:spPr>
+          <a:xfrm>
+            <a:off x="8331879" y="2727067"/>
+            <a:ext cx="1285608" cy="369332"/>
+          </a:xfrm>
+          <a:prstGeom prst="rect">
+            <a:avLst/>
+          </a:prstGeom>
+          <a:noFill/>
+        </p:spPr>
+        <p:txBody>
+          <a:bodyPr wrap="none" rtlCol="0">
+            <a:spAutoFit/>
+          </a:bodyPr>
+          <a:lstStyle/>
+          <a:p>
+            <a:r>
+              <a:rPr lang="en-GB" dirty="0">
+                <a:solidFill>
+                  <a:srgbClr val="FF7979"/>
+                </a:solidFill>
+              </a:rPr>
+              <a:t>comparison</a:t>
+            </a:r>
+          </a:p>
+        </p:txBody>
+      </p:sp>
+      <p:cxnSp>
+        <p:nvCxnSpPr>
+          <p:cNvPr id="57" name="Straight Arrow Connector 56">
+            <a:extLst>
+              <a:ext uri="{FF2B5EF4-FFF2-40B4-BE49-F238E27FC236}">
+                <a16:creationId xmlns:a16="http://schemas.microsoft.com/office/drawing/2014/main" id="{75F0F836-74DC-4B4D-885A-4503F35BBA17}"/>
+              </a:ext>
+            </a:extLst>
+          </p:cNvPr>
+          <p:cNvCxnSpPr>
+            <a:cxnSpLocks/>
+            <a:stCxn id="55" idx="1"/>
+          </p:cNvCxnSpPr>
+          <p:nvPr/>
+        </p:nvCxnSpPr>
+        <p:spPr>
+          <a:xfrm flipH="1">
+            <a:off x="7518401" y="2911733"/>
+            <a:ext cx="813478" cy="184666"/>
+          </a:xfrm>
+          <a:prstGeom prst="straightConnector1">
+            <a:avLst/>
+          </a:prstGeom>
+          <a:ln>
+            <a:solidFill>
+              <a:schemeClr val="accent6"/>
+            </a:solidFill>
+            <a:tailEnd type="triangle"/>
+          </a:ln>
+        </p:spPr>
+        <p:style>
+          <a:lnRef idx="1">
+            <a:schemeClr val="accent1"/>
+          </a:lnRef>
+          <a:fillRef idx="0">
+            <a:schemeClr val="accent1"/>
+          </a:fillRef>
+          <a:effectRef idx="0">
+            <a:schemeClr val="accent1"/>
+          </a:effectRef>
+          <a:fontRef idx="minor">
+            <a:schemeClr val="tx1"/>
+          </a:fontRef>
+        </p:style>
+      </p:cxnSp>
+      <p:sp>
+        <p:nvSpPr>
+          <p:cNvPr id="59" name="TextBox 58">
+            <a:extLst>
+              <a:ext uri="{FF2B5EF4-FFF2-40B4-BE49-F238E27FC236}">
+                <a16:creationId xmlns:a16="http://schemas.microsoft.com/office/drawing/2014/main" id="{EA5E830F-88B9-49BC-851F-7BB81B381955}"/>
+              </a:ext>
+            </a:extLst>
+          </p:cNvPr>
+          <p:cNvSpPr txBox="1"/>
+          <p:nvPr/>
+        </p:nvSpPr>
+        <p:spPr>
+          <a:xfrm>
+            <a:off x="8274879" y="2338484"/>
+            <a:ext cx="1068498" cy="369332"/>
+          </a:xfrm>
+          <a:prstGeom prst="rect">
+            <a:avLst/>
+          </a:prstGeom>
+          <a:noFill/>
+        </p:spPr>
+        <p:txBody>
+          <a:bodyPr wrap="none" rtlCol="0">
+            <a:spAutoFit/>
+          </a:bodyPr>
+          <a:lstStyle/>
+          <a:p>
+            <a:r>
+              <a:rPr lang="en-GB" dirty="0">
+                <a:solidFill>
+                  <a:srgbClr val="FF7979"/>
+                </a:solidFill>
+              </a:rPr>
+              <a:t>optimism</a:t>
+            </a:r>
+          </a:p>
+        </p:txBody>
+      </p:sp>
+      <p:cxnSp>
+        <p:nvCxnSpPr>
+          <p:cNvPr id="61" name="Straight Arrow Connector 60">
+            <a:extLst>
+              <a:ext uri="{FF2B5EF4-FFF2-40B4-BE49-F238E27FC236}">
+                <a16:creationId xmlns:a16="http://schemas.microsoft.com/office/drawing/2014/main" id="{C2416E82-3ACB-4B26-B5B0-AFBE812F42F4}"/>
+              </a:ext>
+            </a:extLst>
+          </p:cNvPr>
+          <p:cNvCxnSpPr>
+            <a:cxnSpLocks/>
+            <a:stCxn id="59" idx="1"/>
+          </p:cNvCxnSpPr>
+          <p:nvPr/>
+        </p:nvCxnSpPr>
+        <p:spPr>
+          <a:xfrm flipH="1">
+            <a:off x="7391137" y="2523150"/>
+            <a:ext cx="883742" cy="50814"/>
+          </a:xfrm>
+          <a:prstGeom prst="straightConnector1">
+            <a:avLst/>
+          </a:prstGeom>
+          <a:ln>
+            <a:solidFill>
+              <a:schemeClr val="accent6"/>
+            </a:solidFill>
+            <a:tailEnd type="triangle"/>
+          </a:ln>
+        </p:spPr>
+        <p:style>
+          <a:lnRef idx="1">
+            <a:schemeClr val="accent1"/>
+          </a:lnRef>
+          <a:fillRef idx="0">
+            <a:schemeClr val="accent1"/>
+          </a:fillRef>
+          <a:effectRef idx="0">
+            <a:schemeClr val="accent1"/>
+          </a:effectRef>
+          <a:fontRef idx="minor">
+            <a:schemeClr val="tx1"/>
+          </a:fontRef>
+        </p:style>
+      </p:cxnSp>
+      <p:sp>
+        <p:nvSpPr>
+          <p:cNvPr id="65" name="TextBox 64">
+            <a:extLst>
+              <a:ext uri="{FF2B5EF4-FFF2-40B4-BE49-F238E27FC236}">
+                <a16:creationId xmlns:a16="http://schemas.microsoft.com/office/drawing/2014/main" id="{BCF081AF-953D-4DA8-831D-A80127C0E289}"/>
+              </a:ext>
+            </a:extLst>
+          </p:cNvPr>
+          <p:cNvSpPr txBox="1"/>
+          <p:nvPr/>
+        </p:nvSpPr>
+        <p:spPr>
+          <a:xfrm>
+            <a:off x="9149557" y="4727885"/>
+            <a:ext cx="2316147" cy="369332"/>
+          </a:xfrm>
+          <a:prstGeom prst="rect">
+            <a:avLst/>
+          </a:prstGeom>
+          <a:noFill/>
+        </p:spPr>
+        <p:txBody>
+          <a:bodyPr wrap="none" rtlCol="0">
+            <a:spAutoFit/>
+          </a:bodyPr>
+          <a:lstStyle/>
+          <a:p>
+            <a:r>
+              <a:rPr lang="en-GB" dirty="0">
+                <a:solidFill>
+                  <a:srgbClr val="FF7979"/>
+                </a:solidFill>
+              </a:rPr>
+              <a:t>someone smiled at me</a:t>
+            </a:r>
+          </a:p>
+        </p:txBody>
+      </p:sp>
+      <p:cxnSp>
+        <p:nvCxnSpPr>
+          <p:cNvPr id="67" name="Straight Arrow Connector 66">
+            <a:extLst>
+              <a:ext uri="{FF2B5EF4-FFF2-40B4-BE49-F238E27FC236}">
+                <a16:creationId xmlns:a16="http://schemas.microsoft.com/office/drawing/2014/main" id="{84208586-6D3C-4288-A1F1-95643C00FF18}"/>
+              </a:ext>
+            </a:extLst>
+          </p:cNvPr>
+          <p:cNvCxnSpPr>
+            <a:cxnSpLocks/>
+          </p:cNvCxnSpPr>
+          <p:nvPr/>
+        </p:nvCxnSpPr>
+        <p:spPr>
+          <a:xfrm flipH="1" flipV="1">
+            <a:off x="8263468" y="3835064"/>
+            <a:ext cx="1118158" cy="982491"/>
+          </a:xfrm>
+          <a:prstGeom prst="straightConnector1">
+            <a:avLst/>
+          </a:prstGeom>
+          <a:ln>
+            <a:solidFill>
+              <a:schemeClr val="accent6"/>
+            </a:solidFill>
+            <a:tailEnd type="triangle"/>
+          </a:ln>
+        </p:spPr>
+        <p:style>
+          <a:lnRef idx="1">
+            <a:schemeClr val="accent1"/>
+          </a:lnRef>
+          <a:fillRef idx="0">
+            <a:schemeClr val="accent1"/>
+          </a:fillRef>
+          <a:effectRef idx="0">
+            <a:schemeClr val="accent1"/>
+          </a:effectRef>
+          <a:fontRef idx="minor">
+            <a:schemeClr val="tx1"/>
+          </a:fontRef>
+        </p:style>
+      </p:cxnSp>
+      <p:sp>
+        <p:nvSpPr>
+          <p:cNvPr id="2" name="TextBox 1">
+            <a:extLst>
+              <a:ext uri="{FF2B5EF4-FFF2-40B4-BE49-F238E27FC236}">
+                <a16:creationId xmlns:a16="http://schemas.microsoft.com/office/drawing/2014/main" id="{76B10D40-C1A3-3294-48D8-122ECAC76270}"/>
+              </a:ext>
+            </a:extLst>
+          </p:cNvPr>
+          <p:cNvSpPr txBox="1"/>
+          <p:nvPr/>
+        </p:nvSpPr>
+        <p:spPr>
+          <a:xfrm>
+            <a:off x="3615268" y="1681665"/>
+            <a:ext cx="2590902" cy="369332"/>
+          </a:xfrm>
+          <a:prstGeom prst="rect">
+            <a:avLst/>
+          </a:prstGeom>
+          <a:noFill/>
+        </p:spPr>
+        <p:txBody>
+          <a:bodyPr wrap="none" rtlCol="0">
+            <a:spAutoFit/>
+          </a:bodyPr>
+          <a:lstStyle/>
+          <a:p>
+            <a:r>
+              <a:rPr lang="en-GB" b="1" u="sng" dirty="0"/>
+              <a:t>Life Satisfaction Measure</a:t>
+            </a:r>
+          </a:p>
+        </p:txBody>
+      </p:sp>
+    </p:spTree>
+    <p:extLst>
+      <p:ext uri="{BB962C8B-B14F-4D97-AF65-F5344CB8AC3E}">
+        <p14:creationId xmlns:p14="http://schemas.microsoft.com/office/powerpoint/2010/main" val="439410610"/>
+      </p:ext>
+    </p:extLst>
+  </p:cSld>
+  <p:clrMapOvr>
+    <a:masterClrMapping/>
+  </p:clrMapOvr>
+</p:sld>
+</file>
+
+<file path=ppt/slides/slide2.xml><?xml version="1.0" encoding="utf-8"?>
+<p:sld xmlns:a="http://schemas.openxmlformats.org/drawingml/2006/main" xmlns:r="http://schemas.openxmlformats.org/officeDocument/2006/relationships" xmlns:p="http://schemas.openxmlformats.org/presentationml/2006/main">
+  <p:cSld>
+    <p:spTree>
+      <p:nvGrpSpPr>
+        <p:cNvPr id="1" name=""/>
+        <p:cNvGrpSpPr/>
+        <p:nvPr/>
+      </p:nvGrpSpPr>
+      <p:grpSpPr>
+        <a:xfrm>
+          <a:off x="0" y="0"/>
+          <a:ext cx="0" cy="0"/>
+          <a:chOff x="0" y="0"/>
+          <a:chExt cx="0" cy="0"/>
+        </a:xfrm>
+      </p:grpSpPr>
+      <p:sp>
+        <p:nvSpPr>
           <p:cNvPr id="7" name="Cloud 6">
             <a:extLst>
               <a:ext uri="{FF2B5EF4-FFF2-40B4-BE49-F238E27FC236}">
@@ -4461,10 +5430,45 @@
           </a:fontRef>
         </p:style>
       </p:cxnSp>
+      <p:sp>
+        <p:nvSpPr>
+          <p:cNvPr id="2" name="TextBox 1">
+            <a:extLst>
+              <a:ext uri="{FF2B5EF4-FFF2-40B4-BE49-F238E27FC236}">
+                <a16:creationId xmlns:a16="http://schemas.microsoft.com/office/drawing/2014/main" id="{76B10D40-C1A3-3294-48D8-122ECAC76270}"/>
+              </a:ext>
+            </a:extLst>
+          </p:cNvPr>
+          <p:cNvSpPr txBox="1"/>
+          <p:nvPr/>
+        </p:nvSpPr>
+        <p:spPr>
+          <a:xfrm>
+            <a:off x="3615268" y="1681665"/>
+            <a:ext cx="2590902" cy="369332"/>
+          </a:xfrm>
+          <a:prstGeom prst="rect">
+            <a:avLst/>
+          </a:prstGeom>
+          <a:noFill/>
+        </p:spPr>
+        <p:txBody>
+          <a:bodyPr wrap="none" rtlCol="0">
+            <a:spAutoFit/>
+          </a:bodyPr>
+          <a:lstStyle/>
+          <a:p>
+            <a:r>
+              <a:rPr lang="en-GB" b="1" u="sng" dirty="0"/>
+              <a:t>Life Satisfaction Measure</a:t>
+            </a:r>
+          </a:p>
+        </p:txBody>
+      </p:sp>
     </p:spTree>
     <p:extLst>
       <p:ext uri="{BB962C8B-B14F-4D97-AF65-F5344CB8AC3E}">
-        <p14:creationId xmlns:p14="http://schemas.microsoft.com/office/powerpoint/2010/main" val="439410610"/>
+        <p14:creationId xmlns:p14="http://schemas.microsoft.com/office/powerpoint/2010/main" val="2199354481"/>
       </p:ext>
     </p:extLst>
   </p:cSld>
